--- a/ppts/8 - Time series.pptx
+++ b/ppts/8 - Time series.pptx
@@ -1510,7 +1510,7 @@
           <a:p>
             <a:fld id="{15E4F5CE-CB34-4A0C-9595-867A2C0DB20E}" type="datetimeFigureOut">
               <a:rPr lang="nl-BE" smtClean="0"/>
-              <a:t>16/05/2025</a:t>
+              <a:t>22/05/2025</a:t>
             </a:fld>
             <a:endParaRPr lang="nl-BE"/>
           </a:p>
@@ -1687,7 +1687,7 @@
           <a:p>
             <a:fld id="{4D53584B-980D-4F7D-BA36-682FCDF648BB}" type="datetimeFigureOut">
               <a:rPr lang="nl-BE" smtClean="0"/>
-              <a:t>16/05/2025</a:t>
+              <a:t>22/05/2025</a:t>
             </a:fld>
             <a:endParaRPr lang="nl-BE"/>
           </a:p>
@@ -1999,7 +1999,7 @@
           <a:bodyPr/>
           <a:lstStyle/>
           <a:p>
-            <a:endParaRPr lang="en-GB"/>
+            <a:endParaRPr lang="en-GB" dirty="0"/>
           </a:p>
         </p:txBody>
       </p:sp>
@@ -3214,7 +3214,7 @@
           <a:p>
             <a:fld id="{F456E141-11F1-487F-A892-18B8A63336C7}" type="datetime1">
               <a:rPr lang="nl-BE" smtClean="0"/>
-              <a:t>16/05/2025</a:t>
+              <a:t>22/05/2025</a:t>
             </a:fld>
             <a:endParaRPr lang="nl-BE"/>
           </a:p>
@@ -3530,7 +3530,7 @@
           <a:p>
             <a:fld id="{85CAFD92-94F2-4CD0-8A1D-AA3295115CEC}" type="datetime1">
               <a:rPr lang="nl-BE" smtClean="0"/>
-              <a:t>16/05/2025</a:t>
+              <a:t>22/05/2025</a:t>
             </a:fld>
             <a:endParaRPr lang="nl-BE"/>
           </a:p>
@@ -3710,7 +3710,7 @@
           <a:p>
             <a:fld id="{02B84EFA-B363-4043-A12E-44B39EC7D05B}" type="datetime1">
               <a:rPr lang="nl-BE" smtClean="0"/>
-              <a:t>16/05/2025</a:t>
+              <a:t>22/05/2025</a:t>
             </a:fld>
             <a:endParaRPr lang="nl-BE"/>
           </a:p>
@@ -3909,7 +3909,7 @@
           <a:p>
             <a:fld id="{B7AA89A6-C9B9-4556-BC9E-5E3CF3322A33}" type="datetime1">
               <a:rPr lang="nl-BE" smtClean="0"/>
-              <a:t>16/05/2025</a:t>
+              <a:t>22/05/2025</a:t>
             </a:fld>
             <a:endParaRPr lang="nl-BE"/>
           </a:p>
@@ -4160,7 +4160,7 @@
           <a:p>
             <a:fld id="{6CEB42D4-4FBB-465F-AE58-8ADBDBF671C8}" type="datetime1">
               <a:rPr lang="nl-BE" smtClean="0"/>
-              <a:t>16/05/2025</a:t>
+              <a:t>22/05/2025</a:t>
             </a:fld>
             <a:endParaRPr lang="nl-BE"/>
           </a:p>
@@ -4392,7 +4392,7 @@
           <a:p>
             <a:fld id="{64B405D5-C0FD-42E0-9EB1-2670F471B7BB}" type="datetime1">
               <a:rPr lang="nl-BE" smtClean="0"/>
-              <a:t>16/05/2025</a:t>
+              <a:t>22/05/2025</a:t>
             </a:fld>
             <a:endParaRPr lang="nl-BE"/>
           </a:p>
@@ -4759,7 +4759,7 @@
           <a:p>
             <a:fld id="{4CB55C39-C031-448F-A58F-CA88F7B6F786}" type="datetime1">
               <a:rPr lang="nl-BE" smtClean="0"/>
-              <a:t>16/05/2025</a:t>
+              <a:t>22/05/2025</a:t>
             </a:fld>
             <a:endParaRPr lang="nl-BE"/>
           </a:p>
@@ -4877,7 +4877,7 @@
           <a:p>
             <a:fld id="{E29307F5-1DF0-4FFF-91A4-1E1A6A26A94A}" type="datetime1">
               <a:rPr lang="nl-BE" smtClean="0"/>
-              <a:t>16/05/2025</a:t>
+              <a:t>22/05/2025</a:t>
             </a:fld>
             <a:endParaRPr lang="nl-BE"/>
           </a:p>
@@ -4972,7 +4972,7 @@
           <a:p>
             <a:fld id="{00A9168B-A159-4E9D-A6C6-C6786C6AB2EB}" type="datetime1">
               <a:rPr lang="nl-BE" smtClean="0"/>
-              <a:t>16/05/2025</a:t>
+              <a:t>22/05/2025</a:t>
             </a:fld>
             <a:endParaRPr lang="nl-BE"/>
           </a:p>
@@ -5249,7 +5249,7 @@
           <a:p>
             <a:fld id="{E9D22159-AF82-4D23-BC06-D4277BDD9BAD}" type="datetime1">
               <a:rPr lang="nl-BE" smtClean="0"/>
-              <a:t>16/05/2025</a:t>
+              <a:t>22/05/2025</a:t>
             </a:fld>
             <a:endParaRPr lang="nl-BE"/>
           </a:p>
@@ -5502,7 +5502,7 @@
           <a:p>
             <a:fld id="{D08A7014-C292-4E4F-926C-1A31F538B52A}" type="datetime1">
               <a:rPr lang="nl-BE" smtClean="0"/>
-              <a:t>16/05/2025</a:t>
+              <a:t>22/05/2025</a:t>
             </a:fld>
             <a:endParaRPr lang="nl-BE"/>
           </a:p>
@@ -5715,7 +5715,7 @@
           <a:p>
             <a:fld id="{E9CC7161-F687-474C-905A-3CCBBA535086}" type="datetime1">
               <a:rPr lang="nl-BE" smtClean="0"/>
-              <a:t>16/05/2025</a:t>
+              <a:t>22/05/2025</a:t>
             </a:fld>
             <a:endParaRPr lang="nl-BE"/>
           </a:p>
@@ -11795,12 +11795,8 @@
           <a:lstStyle/>
           <a:p>
             <a:r>
-              <a:rPr lang="en-US" dirty="0" err="1"/>
-              <a:t>TraiN</a:t>
-            </a:r>
-            <a:r>
               <a:rPr lang="en-US" dirty="0"/>
-              <a:t>/test-splits</a:t>
+              <a:t>Train/test-splits</a:t>
             </a:r>
           </a:p>
         </p:txBody>

--- a/ppts/8 - Time series.pptx
+++ b/ppts/8 - Time series.pptx
@@ -821,6 +821,7 @@
     </c:legend>
     <c:plotVisOnly val="1"/>
     <c:dispBlanksAs val="gap"/>
+    <c:showDLblsOverMax val="0"/>
     <c:extLst>
       <c:ext xmlns:c16r3="http://schemas.microsoft.com/office/drawing/2017/03/chart" uri="{56B9EC1D-385E-4148-901F-78D8002777C0}">
         <c16r3:dataDisplayOptions16>
@@ -828,7 +829,6 @@
         </c16r3:dataDisplayOptions16>
       </c:ext>
     </c:extLst>
-    <c:showDLblsOverMax val="0"/>
   </c:chart>
   <c:spPr>
     <a:solidFill>
@@ -1510,7 +1510,7 @@
           <a:p>
             <a:fld id="{15E4F5CE-CB34-4A0C-9595-867A2C0DB20E}" type="datetimeFigureOut">
               <a:rPr lang="nl-BE" smtClean="0"/>
-              <a:t>22/05/2025</a:t>
+              <a:t>4/06/2026</a:t>
             </a:fld>
             <a:endParaRPr lang="nl-BE"/>
           </a:p>
@@ -1687,7 +1687,7 @@
           <a:p>
             <a:fld id="{4D53584B-980D-4F7D-BA36-682FCDF648BB}" type="datetimeFigureOut">
               <a:rPr lang="nl-BE" smtClean="0"/>
-              <a:t>22/05/2025</a:t>
+              <a:t>4/06/2026</a:t>
             </a:fld>
             <a:endParaRPr lang="nl-BE"/>
           </a:p>
@@ -3214,7 +3214,7 @@
           <a:p>
             <a:fld id="{F456E141-11F1-487F-A892-18B8A63336C7}" type="datetime1">
               <a:rPr lang="nl-BE" smtClean="0"/>
-              <a:t>22/05/2025</a:t>
+              <a:t>4/06/2026</a:t>
             </a:fld>
             <a:endParaRPr lang="nl-BE"/>
           </a:p>
@@ -3530,7 +3530,7 @@
           <a:p>
             <a:fld id="{85CAFD92-94F2-4CD0-8A1D-AA3295115CEC}" type="datetime1">
               <a:rPr lang="nl-BE" smtClean="0"/>
-              <a:t>22/05/2025</a:t>
+              <a:t>4/06/2026</a:t>
             </a:fld>
             <a:endParaRPr lang="nl-BE"/>
           </a:p>
@@ -3710,7 +3710,7 @@
           <a:p>
             <a:fld id="{02B84EFA-B363-4043-A12E-44B39EC7D05B}" type="datetime1">
               <a:rPr lang="nl-BE" smtClean="0"/>
-              <a:t>22/05/2025</a:t>
+              <a:t>4/06/2026</a:t>
             </a:fld>
             <a:endParaRPr lang="nl-BE"/>
           </a:p>
@@ -3909,7 +3909,7 @@
           <a:p>
             <a:fld id="{B7AA89A6-C9B9-4556-BC9E-5E3CF3322A33}" type="datetime1">
               <a:rPr lang="nl-BE" smtClean="0"/>
-              <a:t>22/05/2025</a:t>
+              <a:t>4/06/2026</a:t>
             </a:fld>
             <a:endParaRPr lang="nl-BE"/>
           </a:p>
@@ -4160,7 +4160,7 @@
           <a:p>
             <a:fld id="{6CEB42D4-4FBB-465F-AE58-8ADBDBF671C8}" type="datetime1">
               <a:rPr lang="nl-BE" smtClean="0"/>
-              <a:t>22/05/2025</a:t>
+              <a:t>4/06/2026</a:t>
             </a:fld>
             <a:endParaRPr lang="nl-BE"/>
           </a:p>
@@ -4392,7 +4392,7 @@
           <a:p>
             <a:fld id="{64B405D5-C0FD-42E0-9EB1-2670F471B7BB}" type="datetime1">
               <a:rPr lang="nl-BE" smtClean="0"/>
-              <a:t>22/05/2025</a:t>
+              <a:t>4/06/2026</a:t>
             </a:fld>
             <a:endParaRPr lang="nl-BE"/>
           </a:p>
@@ -4759,7 +4759,7 @@
           <a:p>
             <a:fld id="{4CB55C39-C031-448F-A58F-CA88F7B6F786}" type="datetime1">
               <a:rPr lang="nl-BE" smtClean="0"/>
-              <a:t>22/05/2025</a:t>
+              <a:t>4/06/2026</a:t>
             </a:fld>
             <a:endParaRPr lang="nl-BE"/>
           </a:p>
@@ -4877,7 +4877,7 @@
           <a:p>
             <a:fld id="{E29307F5-1DF0-4FFF-91A4-1E1A6A26A94A}" type="datetime1">
               <a:rPr lang="nl-BE" smtClean="0"/>
-              <a:t>22/05/2025</a:t>
+              <a:t>4/06/2026</a:t>
             </a:fld>
             <a:endParaRPr lang="nl-BE"/>
           </a:p>
@@ -4972,7 +4972,7 @@
           <a:p>
             <a:fld id="{00A9168B-A159-4E9D-A6C6-C6786C6AB2EB}" type="datetime1">
               <a:rPr lang="nl-BE" smtClean="0"/>
-              <a:t>22/05/2025</a:t>
+              <a:t>4/06/2026</a:t>
             </a:fld>
             <a:endParaRPr lang="nl-BE"/>
           </a:p>
@@ -5249,7 +5249,7 @@
           <a:p>
             <a:fld id="{E9D22159-AF82-4D23-BC06-D4277BDD9BAD}" type="datetime1">
               <a:rPr lang="nl-BE" smtClean="0"/>
-              <a:t>22/05/2025</a:t>
+              <a:t>4/06/2026</a:t>
             </a:fld>
             <a:endParaRPr lang="nl-BE"/>
           </a:p>
@@ -5502,7 +5502,7 @@
           <a:p>
             <a:fld id="{D08A7014-C292-4E4F-926C-1A31F538B52A}" type="datetime1">
               <a:rPr lang="nl-BE" smtClean="0"/>
-              <a:t>22/05/2025</a:t>
+              <a:t>4/06/2026</a:t>
             </a:fld>
             <a:endParaRPr lang="nl-BE"/>
           </a:p>
@@ -5715,7 +5715,7 @@
           <a:p>
             <a:fld id="{E9CC7161-F687-474C-905A-3CCBBA535086}" type="datetime1">
               <a:rPr lang="nl-BE" smtClean="0"/>
-              <a:t>22/05/2025</a:t>
+              <a:t>4/06/2026</a:t>
             </a:fld>
             <a:endParaRPr lang="nl-BE"/>
           </a:p>
@@ -8763,7 +8763,15 @@
           <a:p>
             <a:r>
               <a:rPr lang="en-US" dirty="0"/>
-              <a:t>The original data was  up to 600, the new data revolves around 0</a:t>
+              <a:t>The original data w</a:t>
+            </a:r>
+            <a:r>
+              <a:rPr lang="en-BE" dirty="0" err="1"/>
+              <a:t>ent</a:t>
+            </a:r>
+            <a:r>
+              <a:rPr lang="en-US" dirty="0"/>
+              <a:t> up to 600, the new data revolves around 0</a:t>
             </a:r>
           </a:p>
           <a:p>
